--- a/Paper/PPT/Reference/0模板.pptx
+++ b/Paper/PPT/Reference/0模板.pptx
@@ -3092,7 +3092,7 @@
                 <a:cs typeface="+mn-ea"/>
                 <a:sym typeface="Arial" panose="020B0604020202090204" pitchFamily="34" charset="0"/>
               </a:rPr>
-              <a:t>2024.</a:t>
+              <a:t>2025.</a:t>
             </a:r>
             <a:r>
               <a:rPr lang="zh-CN" altLang="en-US" sz="3200" b="1" spc="300" dirty="0">
